--- a/design/Cards.pptx
+++ b/design/Cards.pptx
@@ -7,6 +7,8 @@
   <p:sldIdLst>
     <p:sldId id="256" r:id="rId2"/>
     <p:sldId id="257" r:id="rId3"/>
+    <p:sldId id="259" r:id="rId4"/>
+    <p:sldId id="258" r:id="rId5"/>
   </p:sldIdLst>
   <p:sldSz cx="19043650" cy="22860000"/>
   <p:notesSz cx="6858000" cy="9144000"/>
@@ -7455,6 +7457,2276 @@
 </p:sld>
 </file>
 
+<file path=ppt/slides/slide3.xml><?xml version="1.0" encoding="utf-8"?>
+<p:sld xmlns:a="http://schemas.openxmlformats.org/drawingml/2006/main" xmlns:r="http://schemas.openxmlformats.org/officeDocument/2006/relationships" xmlns:p="http://schemas.openxmlformats.org/presentationml/2006/main">
+  <p:cSld>
+    <p:bg>
+      <p:bgPr>
+        <a:solidFill>
+          <a:srgbClr val="532B61"/>
+        </a:solidFill>
+        <a:effectLst/>
+      </p:bgPr>
+    </p:bg>
+    <p:spTree>
+      <p:nvGrpSpPr>
+        <p:cNvPr id="1" name="">
+          <a:extLst>
+            <a:ext uri="{FF2B5EF4-FFF2-40B4-BE49-F238E27FC236}">
+              <a16:creationId xmlns:a16="http://schemas.microsoft.com/office/drawing/2014/main" id="{E30EE2AD-5A3B-ACBF-2BC4-538AA804E247}"/>
+            </a:ext>
+          </a:extLst>
+        </p:cNvPr>
+        <p:cNvGrpSpPr/>
+        <p:nvPr/>
+      </p:nvGrpSpPr>
+      <p:grpSpPr>
+        <a:xfrm>
+          <a:off x="0" y="0"/>
+          <a:ext cx="0" cy="0"/>
+          <a:chOff x="0" y="0"/>
+          <a:chExt cx="0" cy="0"/>
+        </a:xfrm>
+      </p:grpSpPr>
+      <p:sp>
+        <p:nvSpPr>
+          <p:cNvPr id="4" name="Rectangle: Rounded Corners 3">
+            <a:extLst>
+              <a:ext uri="{FF2B5EF4-FFF2-40B4-BE49-F238E27FC236}">
+                <a16:creationId xmlns:a16="http://schemas.microsoft.com/office/drawing/2014/main" id="{B5B69368-2BF2-2AE5-BD9F-38D9F7FE26FD}"/>
+              </a:ext>
+            </a:extLst>
+          </p:cNvPr>
+          <p:cNvSpPr/>
+          <p:nvPr/>
+        </p:nvSpPr>
+        <p:spPr>
+          <a:xfrm>
+            <a:off x="-28491924" y="-13962645"/>
+            <a:ext cx="13724290" cy="16469146"/>
+          </a:xfrm>
+          <a:prstGeom prst="roundRect">
+            <a:avLst>
+              <a:gd name="adj" fmla="val 1783"/>
+            </a:avLst>
+          </a:prstGeom>
+          <a:gradFill flip="none" rotWithShape="1">
+            <a:gsLst>
+              <a:gs pos="100000">
+                <a:srgbClr val="6D1B8D"/>
+              </a:gs>
+              <a:gs pos="1000">
+                <a:srgbClr val="8626A7"/>
+              </a:gs>
+            </a:gsLst>
+            <a:path path="circle">
+              <a:fillToRect l="50000" t="50000" r="50000" b="50000"/>
+            </a:path>
+            <a:tileRect/>
+          </a:gradFill>
+          <a:ln>
+            <a:solidFill>
+              <a:srgbClr val="4F5156"/>
+            </a:solidFill>
+          </a:ln>
+        </p:spPr>
+        <p:style>
+          <a:lnRef idx="2">
+            <a:schemeClr val="accent1">
+              <a:shade val="15000"/>
+            </a:schemeClr>
+          </a:lnRef>
+          <a:fillRef idx="1">
+            <a:schemeClr val="accent1"/>
+          </a:fillRef>
+          <a:effectRef idx="0">
+            <a:schemeClr val="accent1"/>
+          </a:effectRef>
+          <a:fontRef idx="minor">
+            <a:schemeClr val="lt1"/>
+          </a:fontRef>
+        </p:style>
+        <p:txBody>
+          <a:bodyPr rtlCol="0" anchor="ctr"/>
+          <a:lstStyle/>
+          <a:p>
+            <a:pPr algn="ctr"/>
+            <a:endParaRPr lang="fr-FR" dirty="0"/>
+          </a:p>
+        </p:txBody>
+      </p:sp>
+      <p:sp>
+        <p:nvSpPr>
+          <p:cNvPr id="5" name="Isosceles Triangle 4">
+            <a:extLst>
+              <a:ext uri="{FF2B5EF4-FFF2-40B4-BE49-F238E27FC236}">
+                <a16:creationId xmlns:a16="http://schemas.microsoft.com/office/drawing/2014/main" id="{96CBFDE4-3633-CBB0-660E-52262B7AF3CE}"/>
+              </a:ext>
+            </a:extLst>
+          </p:cNvPr>
+          <p:cNvSpPr/>
+          <p:nvPr/>
+        </p:nvSpPr>
+        <p:spPr>
+          <a:xfrm>
+            <a:off x="-14227795" y="-7438795"/>
+            <a:ext cx="360902" cy="1027410"/>
+          </a:xfrm>
+          <a:prstGeom prst="triangle">
+            <a:avLst>
+              <a:gd name="adj" fmla="val 49369"/>
+            </a:avLst>
+          </a:prstGeom>
+          <a:gradFill>
+            <a:gsLst>
+              <a:gs pos="30000">
+                <a:srgbClr val="5A1579">
+                  <a:alpha val="0"/>
+                </a:srgbClr>
+              </a:gs>
+              <a:gs pos="64000">
+                <a:srgbClr val="5A1579">
+                  <a:alpha val="92000"/>
+                </a:srgbClr>
+              </a:gs>
+            </a:gsLst>
+            <a:lin ang="5400000" scaled="1"/>
+          </a:gradFill>
+          <a:ln>
+            <a:noFill/>
+          </a:ln>
+        </p:spPr>
+        <p:style>
+          <a:lnRef idx="2">
+            <a:schemeClr val="accent1">
+              <a:shade val="15000"/>
+            </a:schemeClr>
+          </a:lnRef>
+          <a:fillRef idx="1">
+            <a:schemeClr val="accent1"/>
+          </a:fillRef>
+          <a:effectRef idx="0">
+            <a:schemeClr val="accent1"/>
+          </a:effectRef>
+          <a:fontRef idx="minor">
+            <a:schemeClr val="lt1"/>
+          </a:fontRef>
+        </p:style>
+        <p:txBody>
+          <a:bodyPr rtlCol="0" anchor="ctr"/>
+          <a:lstStyle/>
+          <a:p>
+            <a:pPr algn="ctr"/>
+            <a:endParaRPr lang="fr-FR"/>
+          </a:p>
+        </p:txBody>
+      </p:sp>
+      <p:sp>
+        <p:nvSpPr>
+          <p:cNvPr id="6" name="Isosceles Triangle 5">
+            <a:extLst>
+              <a:ext uri="{FF2B5EF4-FFF2-40B4-BE49-F238E27FC236}">
+                <a16:creationId xmlns:a16="http://schemas.microsoft.com/office/drawing/2014/main" id="{558B579E-E9B6-0655-9CB9-C1950CA531DD}"/>
+              </a:ext>
+            </a:extLst>
+          </p:cNvPr>
+          <p:cNvSpPr/>
+          <p:nvPr/>
+        </p:nvSpPr>
+        <p:spPr>
+          <a:xfrm rot="18900000">
+            <a:off x="-13755389" y="-7641935"/>
+            <a:ext cx="360902" cy="1292188"/>
+          </a:xfrm>
+          <a:prstGeom prst="triangle">
+            <a:avLst>
+              <a:gd name="adj" fmla="val 49369"/>
+            </a:avLst>
+          </a:prstGeom>
+          <a:gradFill>
+            <a:gsLst>
+              <a:gs pos="30000">
+                <a:srgbClr val="5A1579">
+                  <a:alpha val="0"/>
+                </a:srgbClr>
+              </a:gs>
+              <a:gs pos="64000">
+                <a:srgbClr val="5A1579">
+                  <a:alpha val="92000"/>
+                </a:srgbClr>
+              </a:gs>
+            </a:gsLst>
+            <a:lin ang="5400000" scaled="1"/>
+          </a:gradFill>
+          <a:ln>
+            <a:noFill/>
+          </a:ln>
+        </p:spPr>
+        <p:style>
+          <a:lnRef idx="2">
+            <a:schemeClr val="accent1">
+              <a:shade val="15000"/>
+            </a:schemeClr>
+          </a:lnRef>
+          <a:fillRef idx="1">
+            <a:schemeClr val="accent1"/>
+          </a:fillRef>
+          <a:effectRef idx="0">
+            <a:schemeClr val="accent1"/>
+          </a:effectRef>
+          <a:fontRef idx="minor">
+            <a:schemeClr val="lt1"/>
+          </a:fontRef>
+        </p:style>
+        <p:txBody>
+          <a:bodyPr rtlCol="0" anchor="ctr"/>
+          <a:lstStyle/>
+          <a:p>
+            <a:pPr algn="ctr"/>
+            <a:endParaRPr lang="fr-FR"/>
+          </a:p>
+        </p:txBody>
+      </p:sp>
+      <p:sp>
+        <p:nvSpPr>
+          <p:cNvPr id="7" name="Isosceles Triangle 6">
+            <a:extLst>
+              <a:ext uri="{FF2B5EF4-FFF2-40B4-BE49-F238E27FC236}">
+                <a16:creationId xmlns:a16="http://schemas.microsoft.com/office/drawing/2014/main" id="{E7E1D166-858B-9397-B827-F033C37C5A59}"/>
+              </a:ext>
+            </a:extLst>
+          </p:cNvPr>
+          <p:cNvSpPr/>
+          <p:nvPr/>
+        </p:nvSpPr>
+        <p:spPr>
+          <a:xfrm rot="8556143">
+            <a:off x="-14614078" y="-8552852"/>
+            <a:ext cx="360902" cy="1214032"/>
+          </a:xfrm>
+          <a:prstGeom prst="triangle">
+            <a:avLst>
+              <a:gd name="adj" fmla="val 49369"/>
+            </a:avLst>
+          </a:prstGeom>
+          <a:gradFill>
+            <a:gsLst>
+              <a:gs pos="30000">
+                <a:srgbClr val="5A1579">
+                  <a:alpha val="0"/>
+                </a:srgbClr>
+              </a:gs>
+              <a:gs pos="64000">
+                <a:srgbClr val="5A1579">
+                  <a:alpha val="91765"/>
+                </a:srgbClr>
+              </a:gs>
+            </a:gsLst>
+            <a:lin ang="5400000" scaled="1"/>
+          </a:gradFill>
+          <a:ln>
+            <a:noFill/>
+          </a:ln>
+        </p:spPr>
+        <p:style>
+          <a:lnRef idx="2">
+            <a:schemeClr val="accent1">
+              <a:shade val="15000"/>
+            </a:schemeClr>
+          </a:lnRef>
+          <a:fillRef idx="1">
+            <a:schemeClr val="accent1"/>
+          </a:fillRef>
+          <a:effectRef idx="0">
+            <a:schemeClr val="accent1"/>
+          </a:effectRef>
+          <a:fontRef idx="minor">
+            <a:schemeClr val="lt1"/>
+          </a:fontRef>
+        </p:style>
+        <p:txBody>
+          <a:bodyPr rtlCol="0" anchor="ctr"/>
+          <a:lstStyle/>
+          <a:p>
+            <a:pPr algn="ctr"/>
+            <a:endParaRPr lang="fr-FR"/>
+          </a:p>
+        </p:txBody>
+      </p:sp>
+      <p:sp>
+        <p:nvSpPr>
+          <p:cNvPr id="8" name="Isosceles Triangle 7">
+            <a:extLst>
+              <a:ext uri="{FF2B5EF4-FFF2-40B4-BE49-F238E27FC236}">
+                <a16:creationId xmlns:a16="http://schemas.microsoft.com/office/drawing/2014/main" id="{FA907536-EB82-2F6F-B32C-53E67321BED4}"/>
+              </a:ext>
+            </a:extLst>
+          </p:cNvPr>
+          <p:cNvSpPr/>
+          <p:nvPr/>
+        </p:nvSpPr>
+        <p:spPr>
+          <a:xfrm rot="13500000">
+            <a:off x="-13791185" y="-8491215"/>
+            <a:ext cx="360902" cy="1212757"/>
+          </a:xfrm>
+          <a:prstGeom prst="triangle">
+            <a:avLst>
+              <a:gd name="adj" fmla="val 49369"/>
+            </a:avLst>
+          </a:prstGeom>
+          <a:gradFill flip="none" rotWithShape="1">
+            <a:gsLst>
+              <a:gs pos="30000">
+                <a:srgbClr val="5A1579">
+                  <a:alpha val="0"/>
+                </a:srgbClr>
+              </a:gs>
+              <a:gs pos="64000">
+                <a:srgbClr val="5A1579">
+                  <a:alpha val="92000"/>
+                </a:srgbClr>
+              </a:gs>
+            </a:gsLst>
+            <a:lin ang="5400000" scaled="1"/>
+            <a:tileRect/>
+          </a:gradFill>
+          <a:ln>
+            <a:noFill/>
+          </a:ln>
+        </p:spPr>
+        <p:style>
+          <a:lnRef idx="2">
+            <a:schemeClr val="accent1">
+              <a:shade val="15000"/>
+            </a:schemeClr>
+          </a:lnRef>
+          <a:fillRef idx="1">
+            <a:schemeClr val="accent1"/>
+          </a:fillRef>
+          <a:effectRef idx="0">
+            <a:schemeClr val="accent1"/>
+          </a:effectRef>
+          <a:fontRef idx="minor">
+            <a:schemeClr val="lt1"/>
+          </a:fontRef>
+        </p:style>
+        <p:txBody>
+          <a:bodyPr rtlCol="0" anchor="ctr"/>
+          <a:lstStyle/>
+          <a:p>
+            <a:pPr algn="ctr"/>
+            <a:endParaRPr lang="fr-FR"/>
+          </a:p>
+        </p:txBody>
+      </p:sp>
+      <p:sp>
+        <p:nvSpPr>
+          <p:cNvPr id="9" name="Isosceles Triangle 8">
+            <a:extLst>
+              <a:ext uri="{FF2B5EF4-FFF2-40B4-BE49-F238E27FC236}">
+                <a16:creationId xmlns:a16="http://schemas.microsoft.com/office/drawing/2014/main" id="{9E97A2CF-010D-9E57-CA4E-9F02FADFA15B}"/>
+              </a:ext>
+            </a:extLst>
+          </p:cNvPr>
+          <p:cNvSpPr/>
+          <p:nvPr/>
+        </p:nvSpPr>
+        <p:spPr>
+          <a:xfrm rot="16200000">
+            <a:off x="-13683428" y="-7975356"/>
+            <a:ext cx="360902" cy="1039754"/>
+          </a:xfrm>
+          <a:prstGeom prst="triangle">
+            <a:avLst>
+              <a:gd name="adj" fmla="val 49369"/>
+            </a:avLst>
+          </a:prstGeom>
+          <a:gradFill>
+            <a:gsLst>
+              <a:gs pos="30000">
+                <a:srgbClr val="5A1579">
+                  <a:alpha val="0"/>
+                </a:srgbClr>
+              </a:gs>
+              <a:gs pos="64000">
+                <a:srgbClr val="5A1579">
+                  <a:alpha val="92000"/>
+                </a:srgbClr>
+              </a:gs>
+            </a:gsLst>
+            <a:lin ang="5400000" scaled="1"/>
+          </a:gradFill>
+          <a:ln>
+            <a:noFill/>
+          </a:ln>
+        </p:spPr>
+        <p:style>
+          <a:lnRef idx="2">
+            <a:schemeClr val="accent1">
+              <a:shade val="15000"/>
+            </a:schemeClr>
+          </a:lnRef>
+          <a:fillRef idx="1">
+            <a:schemeClr val="accent1"/>
+          </a:fillRef>
+          <a:effectRef idx="0">
+            <a:schemeClr val="accent1"/>
+          </a:effectRef>
+          <a:fontRef idx="minor">
+            <a:schemeClr val="lt1"/>
+          </a:fontRef>
+        </p:style>
+        <p:txBody>
+          <a:bodyPr rtlCol="0" anchor="ctr"/>
+          <a:lstStyle/>
+          <a:p>
+            <a:pPr algn="ctr"/>
+            <a:endParaRPr lang="fr-FR" dirty="0"/>
+          </a:p>
+        </p:txBody>
+      </p:sp>
+      <p:sp>
+        <p:nvSpPr>
+          <p:cNvPr id="10" name="Isosceles Triangle 9">
+            <a:extLst>
+              <a:ext uri="{FF2B5EF4-FFF2-40B4-BE49-F238E27FC236}">
+                <a16:creationId xmlns:a16="http://schemas.microsoft.com/office/drawing/2014/main" id="{7B60AB22-18BE-3EE8-00F0-27E8564537AF}"/>
+              </a:ext>
+            </a:extLst>
+          </p:cNvPr>
+          <p:cNvSpPr/>
+          <p:nvPr/>
+        </p:nvSpPr>
+        <p:spPr>
+          <a:xfrm rot="5400000">
+            <a:off x="-14768083" y="-7970522"/>
+            <a:ext cx="360902" cy="1039754"/>
+          </a:xfrm>
+          <a:prstGeom prst="triangle">
+            <a:avLst>
+              <a:gd name="adj" fmla="val 49369"/>
+            </a:avLst>
+          </a:prstGeom>
+          <a:gradFill>
+            <a:gsLst>
+              <a:gs pos="30000">
+                <a:srgbClr val="5A1579">
+                  <a:alpha val="0"/>
+                </a:srgbClr>
+              </a:gs>
+              <a:gs pos="64000">
+                <a:srgbClr val="5A1579">
+                  <a:alpha val="92000"/>
+                </a:srgbClr>
+              </a:gs>
+            </a:gsLst>
+            <a:lin ang="5400000" scaled="1"/>
+          </a:gradFill>
+          <a:ln>
+            <a:noFill/>
+          </a:ln>
+        </p:spPr>
+        <p:style>
+          <a:lnRef idx="2">
+            <a:schemeClr val="accent1">
+              <a:shade val="15000"/>
+            </a:schemeClr>
+          </a:lnRef>
+          <a:fillRef idx="1">
+            <a:schemeClr val="accent1"/>
+          </a:fillRef>
+          <a:effectRef idx="0">
+            <a:schemeClr val="accent1"/>
+          </a:effectRef>
+          <a:fontRef idx="minor">
+            <a:schemeClr val="lt1"/>
+          </a:fontRef>
+        </p:style>
+        <p:txBody>
+          <a:bodyPr rtlCol="0" anchor="ctr"/>
+          <a:lstStyle/>
+          <a:p>
+            <a:pPr algn="ctr"/>
+            <a:endParaRPr lang="fr-FR" dirty="0"/>
+          </a:p>
+        </p:txBody>
+      </p:sp>
+      <p:sp>
+        <p:nvSpPr>
+          <p:cNvPr id="11" name="Isosceles Triangle 10">
+            <a:extLst>
+              <a:ext uri="{FF2B5EF4-FFF2-40B4-BE49-F238E27FC236}">
+                <a16:creationId xmlns:a16="http://schemas.microsoft.com/office/drawing/2014/main" id="{EF18C80F-A28D-9EEB-9AEA-2CD58309289A}"/>
+              </a:ext>
+            </a:extLst>
+          </p:cNvPr>
+          <p:cNvSpPr/>
+          <p:nvPr/>
+        </p:nvSpPr>
+        <p:spPr>
+          <a:xfrm rot="3092766">
+            <a:off x="-14711622" y="-7658971"/>
+            <a:ext cx="360902" cy="1212757"/>
+          </a:xfrm>
+          <a:prstGeom prst="triangle">
+            <a:avLst>
+              <a:gd name="adj" fmla="val 49369"/>
+            </a:avLst>
+          </a:prstGeom>
+          <a:gradFill>
+            <a:gsLst>
+              <a:gs pos="30000">
+                <a:srgbClr val="5A1579">
+                  <a:alpha val="0"/>
+                </a:srgbClr>
+              </a:gs>
+              <a:gs pos="64000">
+                <a:srgbClr val="5A1579">
+                  <a:alpha val="92000"/>
+                </a:srgbClr>
+              </a:gs>
+            </a:gsLst>
+            <a:lin ang="5400000" scaled="1"/>
+          </a:gradFill>
+          <a:ln>
+            <a:noFill/>
+          </a:ln>
+        </p:spPr>
+        <p:style>
+          <a:lnRef idx="2">
+            <a:schemeClr val="accent1">
+              <a:shade val="15000"/>
+            </a:schemeClr>
+          </a:lnRef>
+          <a:fillRef idx="1">
+            <a:schemeClr val="accent1"/>
+          </a:fillRef>
+          <a:effectRef idx="0">
+            <a:schemeClr val="accent1"/>
+          </a:effectRef>
+          <a:fontRef idx="minor">
+            <a:schemeClr val="lt1"/>
+          </a:fontRef>
+        </p:style>
+        <p:txBody>
+          <a:bodyPr rtlCol="0" anchor="ctr"/>
+          <a:lstStyle/>
+          <a:p>
+            <a:pPr algn="ctr"/>
+            <a:endParaRPr lang="fr-FR"/>
+          </a:p>
+        </p:txBody>
+      </p:sp>
+      <p:grpSp>
+        <p:nvGrpSpPr>
+          <p:cNvPr id="12" name="Group 11">
+            <a:extLst>
+              <a:ext uri="{FF2B5EF4-FFF2-40B4-BE49-F238E27FC236}">
+                <a16:creationId xmlns:a16="http://schemas.microsoft.com/office/drawing/2014/main" id="{B974EBB4-9EEF-5AC1-1593-81CB06F29986}"/>
+              </a:ext>
+            </a:extLst>
+          </p:cNvPr>
+          <p:cNvGrpSpPr/>
+          <p:nvPr/>
+        </p:nvGrpSpPr>
+        <p:grpSpPr>
+          <a:xfrm>
+            <a:off x="-22133135" y="5598544"/>
+            <a:ext cx="6624799" cy="5946694"/>
+            <a:chOff x="1126661" y="2780365"/>
+            <a:chExt cx="287411" cy="257992"/>
+          </a:xfrm>
+          <a:solidFill>
+            <a:schemeClr val="bg1">
+              <a:lumMod val="95000"/>
+            </a:schemeClr>
+          </a:solidFill>
+        </p:grpSpPr>
+        <p:sp>
+          <p:nvSpPr>
+            <p:cNvPr id="13" name="Freeform: Shape 12">
+              <a:extLst>
+                <a:ext uri="{FF2B5EF4-FFF2-40B4-BE49-F238E27FC236}">
+                  <a16:creationId xmlns:a16="http://schemas.microsoft.com/office/drawing/2014/main" id="{81B231DC-2B76-F8F9-45D2-0AFB2B636C31}"/>
+                </a:ext>
+              </a:extLst>
+            </p:cNvPr>
+            <p:cNvSpPr/>
+            <p:nvPr/>
+          </p:nvSpPr>
+          <p:spPr>
+            <a:xfrm rot="19800000">
+              <a:off x="1126661" y="2780365"/>
+              <a:ext cx="158963" cy="249445"/>
+            </a:xfrm>
+            <a:custGeom>
+              <a:avLst/>
+              <a:gdLst>
+                <a:gd name="csX0" fmla="*/ 155514 w 158963"/>
+                <a:gd name="csY0" fmla="*/ 3449 h 249445"/>
+                <a:gd name="csX1" fmla="*/ 158963 w 158963"/>
+                <a:gd name="csY1" fmla="*/ 11776 h 249445"/>
+                <a:gd name="csX2" fmla="*/ 158963 w 158963"/>
+                <a:gd name="csY2" fmla="*/ 115250 h 249445"/>
+                <a:gd name="csX3" fmla="*/ 44654 w 158963"/>
+                <a:gd name="csY3" fmla="*/ 181246 h 249445"/>
+                <a:gd name="csX4" fmla="*/ 40293 w 158963"/>
+                <a:gd name="csY4" fmla="*/ 197525 h 249445"/>
+                <a:gd name="csX5" fmla="*/ 70269 w 158963"/>
+                <a:gd name="csY5" fmla="*/ 249445 h 249445"/>
+                <a:gd name="csX6" fmla="*/ 11776 w 158963"/>
+                <a:gd name="csY6" fmla="*/ 249445 h 249445"/>
+                <a:gd name="csX7" fmla="*/ 0 w 158963"/>
+                <a:gd name="csY7" fmla="*/ 237669 h 249445"/>
+                <a:gd name="csX8" fmla="*/ 0 w 158963"/>
+                <a:gd name="csY8" fmla="*/ 11776 h 249445"/>
+                <a:gd name="csX9" fmla="*/ 11776 w 158963"/>
+                <a:gd name="csY9" fmla="*/ 0 h 249445"/>
+                <a:gd name="csX10" fmla="*/ 147187 w 158963"/>
+                <a:gd name="csY10" fmla="*/ 0 h 249445"/>
+                <a:gd name="csX11" fmla="*/ 155514 w 158963"/>
+                <a:gd name="csY11" fmla="*/ 3449 h 249445"/>
+              </a:gdLst>
+              <a:ahLst/>
+              <a:cxnLst>
+                <a:cxn ang="0">
+                  <a:pos x="csX0" y="csY0"/>
+                </a:cxn>
+                <a:cxn ang="0">
+                  <a:pos x="csX1" y="csY1"/>
+                </a:cxn>
+                <a:cxn ang="0">
+                  <a:pos x="csX2" y="csY2"/>
+                </a:cxn>
+                <a:cxn ang="0">
+                  <a:pos x="csX3" y="csY3"/>
+                </a:cxn>
+                <a:cxn ang="0">
+                  <a:pos x="csX4" y="csY4"/>
+                </a:cxn>
+                <a:cxn ang="0">
+                  <a:pos x="csX5" y="csY5"/>
+                </a:cxn>
+                <a:cxn ang="0">
+                  <a:pos x="csX6" y="csY6"/>
+                </a:cxn>
+                <a:cxn ang="0">
+                  <a:pos x="csX7" y="csY7"/>
+                </a:cxn>
+                <a:cxn ang="0">
+                  <a:pos x="csX8" y="csY8"/>
+                </a:cxn>
+                <a:cxn ang="0">
+                  <a:pos x="csX9" y="csY9"/>
+                </a:cxn>
+                <a:cxn ang="0">
+                  <a:pos x="csX10" y="csY10"/>
+                </a:cxn>
+                <a:cxn ang="0">
+                  <a:pos x="csX11" y="csY11"/>
+                </a:cxn>
+              </a:cxnLst>
+              <a:rect l="l" t="t" r="r" b="b"/>
+              <a:pathLst>
+                <a:path w="158963" h="249445">
+                  <a:moveTo>
+                    <a:pt x="155514" y="3449"/>
+                  </a:moveTo>
+                  <a:cubicBezTo>
+                    <a:pt x="157645" y="5580"/>
+                    <a:pt x="158963" y="8524"/>
+                    <a:pt x="158963" y="11776"/>
+                  </a:cubicBezTo>
+                  <a:lnTo>
+                    <a:pt x="158963" y="115250"/>
+                  </a:lnTo>
+                  <a:lnTo>
+                    <a:pt x="44654" y="181246"/>
+                  </a:lnTo>
+                  <a:cubicBezTo>
+                    <a:pt x="38954" y="184537"/>
+                    <a:pt x="37002" y="191825"/>
+                    <a:pt x="40293" y="197525"/>
+                  </a:cubicBezTo>
+                  <a:lnTo>
+                    <a:pt x="70269" y="249445"/>
+                  </a:lnTo>
+                  <a:lnTo>
+                    <a:pt x="11776" y="249445"/>
+                  </a:lnTo>
+                  <a:cubicBezTo>
+                    <a:pt x="5272" y="249445"/>
+                    <a:pt x="0" y="244173"/>
+                    <a:pt x="0" y="237669"/>
+                  </a:cubicBezTo>
+                  <a:lnTo>
+                    <a:pt x="0" y="11776"/>
+                  </a:lnTo>
+                  <a:cubicBezTo>
+                    <a:pt x="0" y="5272"/>
+                    <a:pt x="5272" y="0"/>
+                    <a:pt x="11776" y="0"/>
+                  </a:cubicBezTo>
+                  <a:lnTo>
+                    <a:pt x="147187" y="0"/>
+                  </a:lnTo>
+                  <a:cubicBezTo>
+                    <a:pt x="150439" y="0"/>
+                    <a:pt x="153383" y="1318"/>
+                    <a:pt x="155514" y="3449"/>
+                  </a:cubicBezTo>
+                  <a:close/>
+                </a:path>
+              </a:pathLst>
+            </a:custGeom>
+            <a:grpFill/>
+            <a:ln>
+              <a:noFill/>
+            </a:ln>
+          </p:spPr>
+          <p:style>
+            <a:lnRef idx="2">
+              <a:schemeClr val="accent1">
+                <a:shade val="15000"/>
+              </a:schemeClr>
+            </a:lnRef>
+            <a:fillRef idx="1">
+              <a:schemeClr val="accent1"/>
+            </a:fillRef>
+            <a:effectRef idx="0">
+              <a:schemeClr val="accent1"/>
+            </a:effectRef>
+            <a:fontRef idx="minor">
+              <a:schemeClr val="lt1"/>
+            </a:fontRef>
+          </p:style>
+          <p:txBody>
+            <a:bodyPr wrap="square" rtlCol="0" anchor="ctr">
+              <a:noAutofit/>
+            </a:bodyPr>
+            <a:lstStyle/>
+            <a:p>
+              <a:pPr algn="ctr"/>
+              <a:endParaRPr lang="fr-FR" dirty="0"/>
+            </a:p>
+          </p:txBody>
+        </p:sp>
+        <p:sp>
+          <p:nvSpPr>
+            <p:cNvPr id="14" name="Rectangle: Rounded Corners 13">
+              <a:extLst>
+                <a:ext uri="{FF2B5EF4-FFF2-40B4-BE49-F238E27FC236}">
+                  <a16:creationId xmlns:a16="http://schemas.microsoft.com/office/drawing/2014/main" id="{9751A330-7A18-05BD-42C3-B69A8AD4E2F5}"/>
+                </a:ext>
+              </a:extLst>
+            </p:cNvPr>
+            <p:cNvSpPr/>
+            <p:nvPr/>
+          </p:nvSpPr>
+          <p:spPr>
+            <a:xfrm rot="1800000">
+              <a:off x="1255109" y="2788912"/>
+              <a:ext cx="158963" cy="249445"/>
+            </a:xfrm>
+            <a:prstGeom prst="roundRect">
+              <a:avLst>
+                <a:gd name="adj" fmla="val 7408"/>
+              </a:avLst>
+            </a:prstGeom>
+            <a:grpFill/>
+            <a:ln>
+              <a:noFill/>
+            </a:ln>
+          </p:spPr>
+          <p:style>
+            <a:lnRef idx="2">
+              <a:schemeClr val="accent1">
+                <a:shade val="15000"/>
+              </a:schemeClr>
+            </a:lnRef>
+            <a:fillRef idx="1">
+              <a:schemeClr val="accent1"/>
+            </a:fillRef>
+            <a:effectRef idx="0">
+              <a:schemeClr val="accent1"/>
+            </a:effectRef>
+            <a:fontRef idx="minor">
+              <a:schemeClr val="lt1"/>
+            </a:fontRef>
+          </p:style>
+          <p:txBody>
+            <a:bodyPr rtlCol="0" anchor="ctr"/>
+            <a:lstStyle/>
+            <a:p>
+              <a:pPr algn="ctr"/>
+              <a:endParaRPr lang="fr-FR" dirty="0"/>
+            </a:p>
+          </p:txBody>
+        </p:sp>
+      </p:grpSp>
+      <p:sp>
+        <p:nvSpPr>
+          <p:cNvPr id="15" name="TextBox 14">
+            <a:extLst>
+              <a:ext uri="{FF2B5EF4-FFF2-40B4-BE49-F238E27FC236}">
+                <a16:creationId xmlns:a16="http://schemas.microsoft.com/office/drawing/2014/main" id="{CCC2C99C-8C69-AF1B-4DA3-34212F6C08DC}"/>
+              </a:ext>
+            </a:extLst>
+          </p:cNvPr>
+          <p:cNvSpPr txBox="1"/>
+          <p:nvPr/>
+        </p:nvSpPr>
+        <p:spPr>
+          <a:xfrm>
+            <a:off x="-14515872" y="-8374768"/>
+            <a:ext cx="961995" cy="369332"/>
+          </a:xfrm>
+          <a:prstGeom prst="rect">
+            <a:avLst/>
+          </a:prstGeom>
+          <a:noFill/>
+        </p:spPr>
+        <p:txBody>
+          <a:bodyPr wrap="none" rtlCol="0">
+            <a:spAutoFit/>
+          </a:bodyPr>
+          <a:lstStyle/>
+          <a:p>
+            <a:r>
+              <a:rPr lang="fr-FR" b="1" dirty="0">
+                <a:solidFill>
+                  <a:schemeClr val="bg1"/>
+                </a:solidFill>
+                <a:latin typeface="Acumin Pro ExtraCondensed" panose="020B0508020202090204" pitchFamily="34" charset="0"/>
+              </a:rPr>
+              <a:t>ARENA #001</a:t>
+            </a:r>
+          </a:p>
+        </p:txBody>
+      </p:sp>
+      <p:grpSp>
+        <p:nvGrpSpPr>
+          <p:cNvPr id="16" name="Group 15">
+            <a:extLst>
+              <a:ext uri="{FF2B5EF4-FFF2-40B4-BE49-F238E27FC236}">
+                <a16:creationId xmlns:a16="http://schemas.microsoft.com/office/drawing/2014/main" id="{1D140B6C-C946-59BF-7ACB-27FC5A4CFCF1}"/>
+              </a:ext>
+            </a:extLst>
+          </p:cNvPr>
+          <p:cNvGrpSpPr/>
+          <p:nvPr/>
+        </p:nvGrpSpPr>
+        <p:grpSpPr>
+          <a:xfrm>
+            <a:off x="-14310092" y="-7089348"/>
+            <a:ext cx="484673" cy="307777"/>
+            <a:chOff x="3120699" y="1874043"/>
+            <a:chExt cx="484673" cy="307777"/>
+          </a:xfrm>
+        </p:grpSpPr>
+        <p:sp>
+          <p:nvSpPr>
+            <p:cNvPr id="17" name="TextBox 16">
+              <a:extLst>
+                <a:ext uri="{FF2B5EF4-FFF2-40B4-BE49-F238E27FC236}">
+                  <a16:creationId xmlns:a16="http://schemas.microsoft.com/office/drawing/2014/main" id="{B563E9E9-4E41-637B-435F-37BB9155726A}"/>
+                </a:ext>
+              </a:extLst>
+            </p:cNvPr>
+            <p:cNvSpPr txBox="1"/>
+            <p:nvPr/>
+          </p:nvSpPr>
+          <p:spPr>
+            <a:xfrm>
+              <a:off x="3120699" y="1874043"/>
+              <a:ext cx="367408" cy="307777"/>
+            </a:xfrm>
+            <a:prstGeom prst="rect">
+              <a:avLst/>
+            </a:prstGeom>
+            <a:noFill/>
+          </p:spPr>
+          <p:txBody>
+            <a:bodyPr wrap="none" rtlCol="0">
+              <a:spAutoFit/>
+            </a:bodyPr>
+            <a:lstStyle/>
+            <a:p>
+              <a:r>
+                <a:rPr lang="fr-FR" sz="1400" b="1" dirty="0">
+                  <a:solidFill>
+                    <a:schemeClr val="bg1"/>
+                  </a:solidFill>
+                </a:rPr>
+                <a:t>13</a:t>
+              </a:r>
+            </a:p>
+          </p:txBody>
+        </p:sp>
+        <p:pic>
+          <p:nvPicPr>
+            <p:cNvPr id="18" name="Picture 17">
+              <a:extLst>
+                <a:ext uri="{FF2B5EF4-FFF2-40B4-BE49-F238E27FC236}">
+                  <a16:creationId xmlns:a16="http://schemas.microsoft.com/office/drawing/2014/main" id="{2FC50F0C-0F41-601B-3EE6-F1127A39DDE6}"/>
+                </a:ext>
+              </a:extLst>
+            </p:cNvPr>
+            <p:cNvPicPr>
+              <a:picLocks noChangeAspect="1"/>
+            </p:cNvPicPr>
+            <p:nvPr/>
+          </p:nvPicPr>
+          <p:blipFill>
+            <a:blip r:embed="rId2">
+              <a:extLst>
+                <a:ext uri="{28A0092B-C50C-407E-A947-70E740481C1C}">
+                  <a14:useLocalDpi xmlns:a14="http://schemas.microsoft.com/office/drawing/2010/main" val="0"/>
+                </a:ext>
+              </a:extLst>
+            </a:blip>
+            <a:stretch>
+              <a:fillRect/>
+            </a:stretch>
+          </p:blipFill>
+          <p:spPr>
+            <a:xfrm>
+              <a:off x="3438706" y="1949771"/>
+              <a:ext cx="166666" cy="154333"/>
+            </a:xfrm>
+            <a:prstGeom prst="rect">
+              <a:avLst/>
+            </a:prstGeom>
+          </p:spPr>
+        </p:pic>
+      </p:grpSp>
+      <p:sp>
+        <p:nvSpPr>
+          <p:cNvPr id="21" name="Rectangle 20">
+            <a:extLst>
+              <a:ext uri="{FF2B5EF4-FFF2-40B4-BE49-F238E27FC236}">
+                <a16:creationId xmlns:a16="http://schemas.microsoft.com/office/drawing/2014/main" id="{1E947288-600B-B3F6-DB5E-BEC5A30DED92}"/>
+              </a:ext>
+            </a:extLst>
+          </p:cNvPr>
+          <p:cNvSpPr/>
+          <p:nvPr/>
+        </p:nvSpPr>
+        <p:spPr>
+          <a:xfrm rot="10800000">
+            <a:off x="-13302115" y="-8432318"/>
+            <a:ext cx="384232" cy="2026434"/>
+          </a:xfrm>
+          <a:prstGeom prst="rect">
+            <a:avLst/>
+          </a:prstGeom>
+          <a:solidFill>
+            <a:srgbClr val="010101"/>
+          </a:solidFill>
+          <a:ln>
+            <a:noFill/>
+          </a:ln>
+        </p:spPr>
+        <p:style>
+          <a:lnRef idx="2">
+            <a:schemeClr val="accent1">
+              <a:shade val="15000"/>
+            </a:schemeClr>
+          </a:lnRef>
+          <a:fillRef idx="1">
+            <a:schemeClr val="accent1"/>
+          </a:fillRef>
+          <a:effectRef idx="0">
+            <a:schemeClr val="accent1"/>
+          </a:effectRef>
+          <a:fontRef idx="minor">
+            <a:schemeClr val="lt1"/>
+          </a:fontRef>
+        </p:style>
+        <p:txBody>
+          <a:bodyPr rtlCol="0" anchor="ctr"/>
+          <a:lstStyle/>
+          <a:p>
+            <a:pPr algn="ctr"/>
+            <a:endParaRPr lang="fr-FR"/>
+          </a:p>
+        </p:txBody>
+      </p:sp>
+      <p:sp>
+        <p:nvSpPr>
+          <p:cNvPr id="23" name="Rectangle: Rounded Corners 22">
+            <a:extLst>
+              <a:ext uri="{FF2B5EF4-FFF2-40B4-BE49-F238E27FC236}">
+                <a16:creationId xmlns:a16="http://schemas.microsoft.com/office/drawing/2014/main" id="{6E529D11-3F97-128A-7A27-E6236011680F}"/>
+              </a:ext>
+            </a:extLst>
+          </p:cNvPr>
+          <p:cNvSpPr/>
+          <p:nvPr/>
+        </p:nvSpPr>
+        <p:spPr>
+          <a:xfrm>
+            <a:off x="-14440970" y="-8046290"/>
+            <a:ext cx="156633" cy="156633"/>
+          </a:xfrm>
+          <a:prstGeom prst="roundRect">
+            <a:avLst>
+              <a:gd name="adj" fmla="val 8559"/>
+            </a:avLst>
+          </a:prstGeom>
+          <a:gradFill>
+            <a:gsLst>
+              <a:gs pos="0">
+                <a:srgbClr val="AB42C8"/>
+              </a:gs>
+              <a:gs pos="100000">
+                <a:srgbClr val="9232AC"/>
+              </a:gs>
+            </a:gsLst>
+            <a:path path="circle">
+              <a:fillToRect l="50000" t="50000" r="50000" b="50000"/>
+            </a:path>
+          </a:gradFill>
+          <a:ln w="3175">
+            <a:solidFill>
+              <a:schemeClr val="bg1"/>
+            </a:solidFill>
+          </a:ln>
+        </p:spPr>
+        <p:style>
+          <a:lnRef idx="2">
+            <a:schemeClr val="accent1">
+              <a:shade val="15000"/>
+            </a:schemeClr>
+          </a:lnRef>
+          <a:fillRef idx="1">
+            <a:schemeClr val="accent1"/>
+          </a:fillRef>
+          <a:effectRef idx="0">
+            <a:schemeClr val="accent1"/>
+          </a:effectRef>
+          <a:fontRef idx="minor">
+            <a:schemeClr val="lt1"/>
+          </a:fontRef>
+        </p:style>
+        <p:txBody>
+          <a:bodyPr rtlCol="0" anchor="ctr"/>
+          <a:lstStyle/>
+          <a:p>
+            <a:pPr algn="ctr"/>
+            <a:r>
+              <a:rPr lang="fr-FR" sz="1050" b="1" dirty="0">
+                <a:solidFill>
+                  <a:schemeClr val="bg1"/>
+                </a:solidFill>
+              </a:rPr>
+              <a:t>🗲</a:t>
+            </a:r>
+            <a:endParaRPr lang="fr-FR" sz="100" dirty="0">
+              <a:solidFill>
+                <a:schemeClr val="bg1"/>
+              </a:solidFill>
+            </a:endParaRPr>
+          </a:p>
+        </p:txBody>
+      </p:sp>
+      <p:grpSp>
+        <p:nvGrpSpPr>
+          <p:cNvPr id="24" name="Group 23">
+            <a:extLst>
+              <a:ext uri="{FF2B5EF4-FFF2-40B4-BE49-F238E27FC236}">
+                <a16:creationId xmlns:a16="http://schemas.microsoft.com/office/drawing/2014/main" id="{92D94C89-E7BC-7DCD-EFB0-AADFBBF6A3F7}"/>
+              </a:ext>
+            </a:extLst>
+          </p:cNvPr>
+          <p:cNvGrpSpPr/>
+          <p:nvPr/>
+        </p:nvGrpSpPr>
+        <p:grpSpPr>
+          <a:xfrm>
+            <a:off x="-14650564" y="-6749486"/>
+            <a:ext cx="1131894" cy="111760"/>
+            <a:chOff x="383656" y="3235474"/>
+            <a:chExt cx="1131894" cy="111760"/>
+          </a:xfrm>
+        </p:grpSpPr>
+        <p:sp>
+          <p:nvSpPr>
+            <p:cNvPr id="25" name="Rectangle 24">
+              <a:extLst>
+                <a:ext uri="{FF2B5EF4-FFF2-40B4-BE49-F238E27FC236}">
+                  <a16:creationId xmlns:a16="http://schemas.microsoft.com/office/drawing/2014/main" id="{944815B6-C457-97F4-5FEA-8E8DC1A27929}"/>
+                </a:ext>
+              </a:extLst>
+            </p:cNvPr>
+            <p:cNvSpPr/>
+            <p:nvPr/>
+          </p:nvSpPr>
+          <p:spPr>
+            <a:xfrm>
+              <a:off x="383656" y="3235474"/>
+              <a:ext cx="111760" cy="111760"/>
+            </a:xfrm>
+            <a:prstGeom prst="rect">
+              <a:avLst/>
+            </a:prstGeom>
+            <a:solidFill>
+              <a:schemeClr val="bg1">
+                <a:lumMod val="95000"/>
+              </a:schemeClr>
+            </a:solidFill>
+            <a:ln>
+              <a:noFill/>
+            </a:ln>
+          </p:spPr>
+          <p:style>
+            <a:lnRef idx="2">
+              <a:schemeClr val="accent1">
+                <a:shade val="15000"/>
+              </a:schemeClr>
+            </a:lnRef>
+            <a:fillRef idx="1">
+              <a:schemeClr val="accent1"/>
+            </a:fillRef>
+            <a:effectRef idx="0">
+              <a:schemeClr val="accent1"/>
+            </a:effectRef>
+            <a:fontRef idx="minor">
+              <a:schemeClr val="lt1"/>
+            </a:fontRef>
+          </p:style>
+          <p:txBody>
+            <a:bodyPr rtlCol="0" anchor="ctr"/>
+            <a:lstStyle/>
+            <a:p>
+              <a:pPr algn="ctr"/>
+              <a:endParaRPr lang="fr-FR"/>
+            </a:p>
+          </p:txBody>
+        </p:sp>
+        <p:sp>
+          <p:nvSpPr>
+            <p:cNvPr id="26" name="Rectangle 25">
+              <a:extLst>
+                <a:ext uri="{FF2B5EF4-FFF2-40B4-BE49-F238E27FC236}">
+                  <a16:creationId xmlns:a16="http://schemas.microsoft.com/office/drawing/2014/main" id="{246B7E3F-7110-1034-7677-7816468DACFD}"/>
+                </a:ext>
+              </a:extLst>
+            </p:cNvPr>
+            <p:cNvSpPr/>
+            <p:nvPr/>
+          </p:nvSpPr>
+          <p:spPr>
+            <a:xfrm>
+              <a:off x="510623" y="3235474"/>
+              <a:ext cx="111760" cy="111760"/>
+            </a:xfrm>
+            <a:prstGeom prst="rect">
+              <a:avLst/>
+            </a:prstGeom>
+            <a:solidFill>
+              <a:schemeClr val="bg1">
+                <a:lumMod val="95000"/>
+              </a:schemeClr>
+            </a:solidFill>
+            <a:ln>
+              <a:noFill/>
+            </a:ln>
+          </p:spPr>
+          <p:style>
+            <a:lnRef idx="2">
+              <a:schemeClr val="accent1">
+                <a:shade val="15000"/>
+              </a:schemeClr>
+            </a:lnRef>
+            <a:fillRef idx="1">
+              <a:schemeClr val="accent1"/>
+            </a:fillRef>
+            <a:effectRef idx="0">
+              <a:schemeClr val="accent1"/>
+            </a:effectRef>
+            <a:fontRef idx="minor">
+              <a:schemeClr val="lt1"/>
+            </a:fontRef>
+          </p:style>
+          <p:txBody>
+            <a:bodyPr rtlCol="0" anchor="ctr"/>
+            <a:lstStyle/>
+            <a:p>
+              <a:pPr algn="ctr"/>
+              <a:endParaRPr lang="fr-FR"/>
+            </a:p>
+          </p:txBody>
+        </p:sp>
+        <p:sp>
+          <p:nvSpPr>
+            <p:cNvPr id="27" name="Rectangle 26">
+              <a:extLst>
+                <a:ext uri="{FF2B5EF4-FFF2-40B4-BE49-F238E27FC236}">
+                  <a16:creationId xmlns:a16="http://schemas.microsoft.com/office/drawing/2014/main" id="{CF69374B-8C77-C9D8-D89F-DF5E4C9F4E38}"/>
+                </a:ext>
+              </a:extLst>
+            </p:cNvPr>
+            <p:cNvSpPr/>
+            <p:nvPr/>
+          </p:nvSpPr>
+          <p:spPr>
+            <a:xfrm>
+              <a:off x="637590" y="3235474"/>
+              <a:ext cx="111760" cy="111760"/>
+            </a:xfrm>
+            <a:prstGeom prst="rect">
+              <a:avLst/>
+            </a:prstGeom>
+            <a:solidFill>
+              <a:schemeClr val="bg1">
+                <a:lumMod val="95000"/>
+              </a:schemeClr>
+            </a:solidFill>
+            <a:ln>
+              <a:noFill/>
+            </a:ln>
+          </p:spPr>
+          <p:style>
+            <a:lnRef idx="2">
+              <a:schemeClr val="accent1">
+                <a:shade val="15000"/>
+              </a:schemeClr>
+            </a:lnRef>
+            <a:fillRef idx="1">
+              <a:schemeClr val="accent1"/>
+            </a:fillRef>
+            <a:effectRef idx="0">
+              <a:schemeClr val="accent1"/>
+            </a:effectRef>
+            <a:fontRef idx="minor">
+              <a:schemeClr val="lt1"/>
+            </a:fontRef>
+          </p:style>
+          <p:txBody>
+            <a:bodyPr rtlCol="0" anchor="ctr"/>
+            <a:lstStyle/>
+            <a:p>
+              <a:pPr algn="ctr"/>
+              <a:endParaRPr lang="fr-FR"/>
+            </a:p>
+          </p:txBody>
+        </p:sp>
+        <p:sp>
+          <p:nvSpPr>
+            <p:cNvPr id="28" name="Rectangle 27">
+              <a:extLst>
+                <a:ext uri="{FF2B5EF4-FFF2-40B4-BE49-F238E27FC236}">
+                  <a16:creationId xmlns:a16="http://schemas.microsoft.com/office/drawing/2014/main" id="{72A87F03-C223-85AA-BA9E-98A82D44C867}"/>
+                </a:ext>
+              </a:extLst>
+            </p:cNvPr>
+            <p:cNvSpPr/>
+            <p:nvPr/>
+          </p:nvSpPr>
+          <p:spPr>
+            <a:xfrm>
+              <a:off x="764557" y="3235474"/>
+              <a:ext cx="111760" cy="111760"/>
+            </a:xfrm>
+            <a:prstGeom prst="rect">
+              <a:avLst/>
+            </a:prstGeom>
+            <a:solidFill>
+              <a:schemeClr val="bg1">
+                <a:lumMod val="50000"/>
+                <a:alpha val="80000"/>
+              </a:schemeClr>
+            </a:solidFill>
+            <a:ln>
+              <a:noFill/>
+            </a:ln>
+          </p:spPr>
+          <p:style>
+            <a:lnRef idx="2">
+              <a:schemeClr val="accent1">
+                <a:shade val="15000"/>
+              </a:schemeClr>
+            </a:lnRef>
+            <a:fillRef idx="1">
+              <a:schemeClr val="accent1"/>
+            </a:fillRef>
+            <a:effectRef idx="0">
+              <a:schemeClr val="accent1"/>
+            </a:effectRef>
+            <a:fontRef idx="minor">
+              <a:schemeClr val="lt1"/>
+            </a:fontRef>
+          </p:style>
+          <p:txBody>
+            <a:bodyPr rtlCol="0" anchor="ctr"/>
+            <a:lstStyle/>
+            <a:p>
+              <a:pPr algn="ctr"/>
+              <a:endParaRPr lang="fr-FR" dirty="0"/>
+            </a:p>
+          </p:txBody>
+        </p:sp>
+        <p:sp>
+          <p:nvSpPr>
+            <p:cNvPr id="29" name="Rectangle 28">
+              <a:extLst>
+                <a:ext uri="{FF2B5EF4-FFF2-40B4-BE49-F238E27FC236}">
+                  <a16:creationId xmlns:a16="http://schemas.microsoft.com/office/drawing/2014/main" id="{DD7334C3-57D8-F9C7-13B3-7D405D646534}"/>
+                </a:ext>
+              </a:extLst>
+            </p:cNvPr>
+            <p:cNvSpPr/>
+            <p:nvPr/>
+          </p:nvSpPr>
+          <p:spPr>
+            <a:xfrm>
+              <a:off x="891524" y="3235474"/>
+              <a:ext cx="111760" cy="111760"/>
+            </a:xfrm>
+            <a:prstGeom prst="rect">
+              <a:avLst/>
+            </a:prstGeom>
+            <a:solidFill>
+              <a:schemeClr val="bg1">
+                <a:lumMod val="50000"/>
+                <a:alpha val="80000"/>
+              </a:schemeClr>
+            </a:solidFill>
+            <a:ln>
+              <a:noFill/>
+            </a:ln>
+          </p:spPr>
+          <p:style>
+            <a:lnRef idx="2">
+              <a:schemeClr val="accent1">
+                <a:shade val="15000"/>
+              </a:schemeClr>
+            </a:lnRef>
+            <a:fillRef idx="1">
+              <a:schemeClr val="accent1"/>
+            </a:fillRef>
+            <a:effectRef idx="0">
+              <a:schemeClr val="accent1"/>
+            </a:effectRef>
+            <a:fontRef idx="minor">
+              <a:schemeClr val="lt1"/>
+            </a:fontRef>
+          </p:style>
+          <p:txBody>
+            <a:bodyPr rtlCol="0" anchor="ctr"/>
+            <a:lstStyle/>
+            <a:p>
+              <a:pPr algn="ctr"/>
+              <a:endParaRPr lang="fr-FR"/>
+            </a:p>
+          </p:txBody>
+        </p:sp>
+        <p:sp>
+          <p:nvSpPr>
+            <p:cNvPr id="30" name="Rectangle 29">
+              <a:extLst>
+                <a:ext uri="{FF2B5EF4-FFF2-40B4-BE49-F238E27FC236}">
+                  <a16:creationId xmlns:a16="http://schemas.microsoft.com/office/drawing/2014/main" id="{0E8CD847-C97C-3345-9BE1-5647C54A50F5}"/>
+                </a:ext>
+              </a:extLst>
+            </p:cNvPr>
+            <p:cNvSpPr/>
+            <p:nvPr/>
+          </p:nvSpPr>
+          <p:spPr>
+            <a:xfrm>
+              <a:off x="1018491" y="3235474"/>
+              <a:ext cx="111760" cy="111760"/>
+            </a:xfrm>
+            <a:prstGeom prst="rect">
+              <a:avLst/>
+            </a:prstGeom>
+            <a:solidFill>
+              <a:schemeClr val="bg1">
+                <a:lumMod val="50000"/>
+                <a:alpha val="80000"/>
+              </a:schemeClr>
+            </a:solidFill>
+            <a:ln>
+              <a:noFill/>
+            </a:ln>
+          </p:spPr>
+          <p:style>
+            <a:lnRef idx="2">
+              <a:schemeClr val="accent1">
+                <a:shade val="15000"/>
+              </a:schemeClr>
+            </a:lnRef>
+            <a:fillRef idx="1">
+              <a:schemeClr val="accent1"/>
+            </a:fillRef>
+            <a:effectRef idx="0">
+              <a:schemeClr val="accent1"/>
+            </a:effectRef>
+            <a:fontRef idx="minor">
+              <a:schemeClr val="lt1"/>
+            </a:fontRef>
+          </p:style>
+          <p:txBody>
+            <a:bodyPr rtlCol="0" anchor="ctr"/>
+            <a:lstStyle/>
+            <a:p>
+              <a:pPr algn="ctr"/>
+              <a:endParaRPr lang="fr-FR"/>
+            </a:p>
+          </p:txBody>
+        </p:sp>
+        <p:sp>
+          <p:nvSpPr>
+            <p:cNvPr id="31" name="Rectangle 30">
+              <a:extLst>
+                <a:ext uri="{FF2B5EF4-FFF2-40B4-BE49-F238E27FC236}">
+                  <a16:creationId xmlns:a16="http://schemas.microsoft.com/office/drawing/2014/main" id="{AE751A2F-53DC-8CFE-54D7-13C86E1EA9D2}"/>
+                </a:ext>
+              </a:extLst>
+            </p:cNvPr>
+            <p:cNvSpPr/>
+            <p:nvPr/>
+          </p:nvSpPr>
+          <p:spPr>
+            <a:xfrm>
+              <a:off x="1145458" y="3235474"/>
+              <a:ext cx="111760" cy="111760"/>
+            </a:xfrm>
+            <a:prstGeom prst="rect">
+              <a:avLst/>
+            </a:prstGeom>
+            <a:solidFill>
+              <a:schemeClr val="bg1">
+                <a:lumMod val="50000"/>
+                <a:alpha val="80000"/>
+              </a:schemeClr>
+            </a:solidFill>
+            <a:ln>
+              <a:noFill/>
+            </a:ln>
+          </p:spPr>
+          <p:style>
+            <a:lnRef idx="2">
+              <a:schemeClr val="accent1">
+                <a:shade val="15000"/>
+              </a:schemeClr>
+            </a:lnRef>
+            <a:fillRef idx="1">
+              <a:schemeClr val="accent1"/>
+            </a:fillRef>
+            <a:effectRef idx="0">
+              <a:schemeClr val="accent1"/>
+            </a:effectRef>
+            <a:fontRef idx="minor">
+              <a:schemeClr val="lt1"/>
+            </a:fontRef>
+          </p:style>
+          <p:txBody>
+            <a:bodyPr rtlCol="0" anchor="ctr"/>
+            <a:lstStyle/>
+            <a:p>
+              <a:pPr algn="ctr"/>
+              <a:endParaRPr lang="fr-FR"/>
+            </a:p>
+          </p:txBody>
+        </p:sp>
+        <p:sp>
+          <p:nvSpPr>
+            <p:cNvPr id="32" name="Rectangle 31">
+              <a:extLst>
+                <a:ext uri="{FF2B5EF4-FFF2-40B4-BE49-F238E27FC236}">
+                  <a16:creationId xmlns:a16="http://schemas.microsoft.com/office/drawing/2014/main" id="{B17D3999-8F2E-F54B-D17E-C4BA11725A9F}"/>
+                </a:ext>
+              </a:extLst>
+            </p:cNvPr>
+            <p:cNvSpPr/>
+            <p:nvPr/>
+          </p:nvSpPr>
+          <p:spPr>
+            <a:xfrm>
+              <a:off x="1274624" y="3235474"/>
+              <a:ext cx="111760" cy="111760"/>
+            </a:xfrm>
+            <a:prstGeom prst="rect">
+              <a:avLst/>
+            </a:prstGeom>
+            <a:solidFill>
+              <a:schemeClr val="bg1">
+                <a:lumMod val="50000"/>
+                <a:alpha val="80000"/>
+              </a:schemeClr>
+            </a:solidFill>
+            <a:ln>
+              <a:noFill/>
+            </a:ln>
+          </p:spPr>
+          <p:style>
+            <a:lnRef idx="2">
+              <a:schemeClr val="accent1">
+                <a:shade val="15000"/>
+              </a:schemeClr>
+            </a:lnRef>
+            <a:fillRef idx="1">
+              <a:schemeClr val="accent1"/>
+            </a:fillRef>
+            <a:effectRef idx="0">
+              <a:schemeClr val="accent1"/>
+            </a:effectRef>
+            <a:fontRef idx="minor">
+              <a:schemeClr val="lt1"/>
+            </a:fontRef>
+          </p:style>
+          <p:txBody>
+            <a:bodyPr rtlCol="0" anchor="ctr"/>
+            <a:lstStyle/>
+            <a:p>
+              <a:pPr algn="ctr"/>
+              <a:endParaRPr lang="fr-FR"/>
+            </a:p>
+          </p:txBody>
+        </p:sp>
+        <p:sp>
+          <p:nvSpPr>
+            <p:cNvPr id="33" name="Rectangle 32">
+              <a:extLst>
+                <a:ext uri="{FF2B5EF4-FFF2-40B4-BE49-F238E27FC236}">
+                  <a16:creationId xmlns:a16="http://schemas.microsoft.com/office/drawing/2014/main" id="{F8733DB8-6368-7D2A-2D32-0C9DDFE20AB0}"/>
+                </a:ext>
+              </a:extLst>
+            </p:cNvPr>
+            <p:cNvSpPr/>
+            <p:nvPr/>
+          </p:nvSpPr>
+          <p:spPr>
+            <a:xfrm>
+              <a:off x="1403790" y="3235474"/>
+              <a:ext cx="111760" cy="111760"/>
+            </a:xfrm>
+            <a:prstGeom prst="rect">
+              <a:avLst/>
+            </a:prstGeom>
+            <a:solidFill>
+              <a:schemeClr val="bg1">
+                <a:lumMod val="50000"/>
+                <a:alpha val="80000"/>
+              </a:schemeClr>
+            </a:solidFill>
+            <a:ln>
+              <a:noFill/>
+            </a:ln>
+          </p:spPr>
+          <p:style>
+            <a:lnRef idx="2">
+              <a:schemeClr val="accent1">
+                <a:shade val="15000"/>
+              </a:schemeClr>
+            </a:lnRef>
+            <a:fillRef idx="1">
+              <a:schemeClr val="accent1"/>
+            </a:fillRef>
+            <a:effectRef idx="0">
+              <a:schemeClr val="accent1"/>
+            </a:effectRef>
+            <a:fontRef idx="minor">
+              <a:schemeClr val="lt1"/>
+            </a:fontRef>
+          </p:style>
+          <p:txBody>
+            <a:bodyPr rtlCol="0" anchor="ctr"/>
+            <a:lstStyle/>
+            <a:p>
+              <a:pPr algn="ctr"/>
+              <a:endParaRPr lang="fr-FR"/>
+            </a:p>
+          </p:txBody>
+        </p:sp>
+      </p:grpSp>
+      <p:sp>
+        <p:nvSpPr>
+          <p:cNvPr id="34" name="Rectangle: Rounded Corners 33">
+            <a:extLst>
+              <a:ext uri="{FF2B5EF4-FFF2-40B4-BE49-F238E27FC236}">
+                <a16:creationId xmlns:a16="http://schemas.microsoft.com/office/drawing/2014/main" id="{ED68238C-0E68-2AAA-55C1-EBD4EC336FFC}"/>
+              </a:ext>
+            </a:extLst>
+          </p:cNvPr>
+          <p:cNvSpPr/>
+          <p:nvPr/>
+        </p:nvSpPr>
+        <p:spPr>
+          <a:xfrm>
+            <a:off x="-14237711" y="-8044430"/>
+            <a:ext cx="156633" cy="156633"/>
+          </a:xfrm>
+          <a:prstGeom prst="roundRect">
+            <a:avLst>
+              <a:gd name="adj" fmla="val 8559"/>
+            </a:avLst>
+          </a:prstGeom>
+          <a:gradFill>
+            <a:gsLst>
+              <a:gs pos="0">
+                <a:schemeClr val="accent6">
+                  <a:lumMod val="75000"/>
+                </a:schemeClr>
+              </a:gs>
+              <a:gs pos="100000">
+                <a:schemeClr val="accent6">
+                  <a:lumMod val="75000"/>
+                </a:schemeClr>
+              </a:gs>
+            </a:gsLst>
+            <a:path path="circle">
+              <a:fillToRect l="50000" t="50000" r="50000" b="50000"/>
+            </a:path>
+          </a:gradFill>
+          <a:ln w="3175">
+            <a:solidFill>
+              <a:schemeClr val="bg1"/>
+            </a:solidFill>
+          </a:ln>
+        </p:spPr>
+        <p:style>
+          <a:lnRef idx="2">
+            <a:schemeClr val="accent1">
+              <a:shade val="15000"/>
+            </a:schemeClr>
+          </a:lnRef>
+          <a:fillRef idx="1">
+            <a:schemeClr val="accent1"/>
+          </a:fillRef>
+          <a:effectRef idx="0">
+            <a:schemeClr val="accent1"/>
+          </a:effectRef>
+          <a:fontRef idx="minor">
+            <a:schemeClr val="lt1"/>
+          </a:fontRef>
+        </p:style>
+        <p:txBody>
+          <a:bodyPr rtlCol="0" anchor="ctr"/>
+          <a:lstStyle/>
+          <a:p>
+            <a:pPr algn="ctr"/>
+            <a:r>
+              <a:rPr lang="fr-FR" sz="1200" b="1" dirty="0">
+                <a:solidFill>
+                  <a:schemeClr val="bg1"/>
+                </a:solidFill>
+              </a:rPr>
+              <a:t>F</a:t>
+            </a:r>
+            <a:endParaRPr lang="fr-FR" sz="200" b="1" dirty="0">
+              <a:solidFill>
+                <a:schemeClr val="bg1"/>
+              </a:solidFill>
+            </a:endParaRPr>
+          </a:p>
+        </p:txBody>
+      </p:sp>
+      <p:sp>
+        <p:nvSpPr>
+          <p:cNvPr id="36" name="Isosceles Triangle 35">
+            <a:extLst>
+              <a:ext uri="{FF2B5EF4-FFF2-40B4-BE49-F238E27FC236}">
+                <a16:creationId xmlns:a16="http://schemas.microsoft.com/office/drawing/2014/main" id="{C83DE138-C5D0-5CED-853E-D0CA32D30827}"/>
+              </a:ext>
+            </a:extLst>
+          </p:cNvPr>
+          <p:cNvSpPr/>
+          <p:nvPr/>
+        </p:nvSpPr>
+        <p:spPr>
+          <a:xfrm rot="19166888">
+            <a:off x="12575571" y="9252106"/>
+            <a:ext cx="5124900" cy="17239562"/>
+          </a:xfrm>
+          <a:prstGeom prst="triangle">
+            <a:avLst>
+              <a:gd name="adj" fmla="val 49369"/>
+            </a:avLst>
+          </a:prstGeom>
+          <a:gradFill>
+            <a:gsLst>
+              <a:gs pos="30000">
+                <a:srgbClr val="452454">
+                  <a:alpha val="0"/>
+                </a:srgbClr>
+              </a:gs>
+              <a:gs pos="64000">
+                <a:srgbClr val="452454">
+                  <a:alpha val="90000"/>
+                </a:srgbClr>
+              </a:gs>
+            </a:gsLst>
+            <a:lin ang="5400000" scaled="1"/>
+          </a:gradFill>
+          <a:ln>
+            <a:noFill/>
+          </a:ln>
+        </p:spPr>
+        <p:style>
+          <a:lnRef idx="2">
+            <a:schemeClr val="accent1">
+              <a:shade val="15000"/>
+            </a:schemeClr>
+          </a:lnRef>
+          <a:fillRef idx="1">
+            <a:schemeClr val="accent1"/>
+          </a:fillRef>
+          <a:effectRef idx="0">
+            <a:schemeClr val="accent1"/>
+          </a:effectRef>
+          <a:fontRef idx="minor">
+            <a:schemeClr val="lt1"/>
+          </a:fontRef>
+        </p:style>
+        <p:txBody>
+          <a:bodyPr rtlCol="0" anchor="ctr"/>
+          <a:lstStyle/>
+          <a:p>
+            <a:pPr algn="ctr"/>
+            <a:endParaRPr lang="fr-FR"/>
+          </a:p>
+        </p:txBody>
+      </p:sp>
+      <p:sp>
+        <p:nvSpPr>
+          <p:cNvPr id="37" name="Isosceles Triangle 36">
+            <a:extLst>
+              <a:ext uri="{FF2B5EF4-FFF2-40B4-BE49-F238E27FC236}">
+                <a16:creationId xmlns:a16="http://schemas.microsoft.com/office/drawing/2014/main" id="{414B145B-B97A-633A-29D9-DAAB5F5FAB45}"/>
+              </a:ext>
+            </a:extLst>
+          </p:cNvPr>
+          <p:cNvSpPr/>
+          <p:nvPr/>
+        </p:nvSpPr>
+        <p:spPr>
+          <a:xfrm rot="8469575">
+            <a:off x="1622259" y="-3806168"/>
+            <a:ext cx="5124900" cy="17239562"/>
+          </a:xfrm>
+          <a:prstGeom prst="triangle">
+            <a:avLst>
+              <a:gd name="adj" fmla="val 49369"/>
+            </a:avLst>
+          </a:prstGeom>
+          <a:gradFill>
+            <a:gsLst>
+              <a:gs pos="30000">
+                <a:srgbClr val="452454">
+                  <a:alpha val="0"/>
+                </a:srgbClr>
+              </a:gs>
+              <a:gs pos="64000">
+                <a:srgbClr val="452454">
+                  <a:alpha val="90000"/>
+                </a:srgbClr>
+              </a:gs>
+            </a:gsLst>
+            <a:lin ang="5400000" scaled="1"/>
+          </a:gradFill>
+          <a:ln>
+            <a:noFill/>
+          </a:ln>
+        </p:spPr>
+        <p:style>
+          <a:lnRef idx="2">
+            <a:schemeClr val="accent1">
+              <a:shade val="15000"/>
+            </a:schemeClr>
+          </a:lnRef>
+          <a:fillRef idx="1">
+            <a:schemeClr val="accent1"/>
+          </a:fillRef>
+          <a:effectRef idx="0">
+            <a:schemeClr val="accent1"/>
+          </a:effectRef>
+          <a:fontRef idx="minor">
+            <a:schemeClr val="lt1"/>
+          </a:fontRef>
+        </p:style>
+        <p:txBody>
+          <a:bodyPr rtlCol="0" anchor="ctr"/>
+          <a:lstStyle/>
+          <a:p>
+            <a:pPr algn="ctr"/>
+            <a:endParaRPr lang="fr-FR"/>
+          </a:p>
+        </p:txBody>
+      </p:sp>
+      <p:sp>
+        <p:nvSpPr>
+          <p:cNvPr id="38" name="Isosceles Triangle 37">
+            <a:extLst>
+              <a:ext uri="{FF2B5EF4-FFF2-40B4-BE49-F238E27FC236}">
+                <a16:creationId xmlns:a16="http://schemas.microsoft.com/office/drawing/2014/main" id="{EF075B6F-FA91-87CD-3ADB-651517BF35A1}"/>
+              </a:ext>
+            </a:extLst>
+          </p:cNvPr>
+          <p:cNvSpPr/>
+          <p:nvPr/>
+        </p:nvSpPr>
+        <p:spPr>
+          <a:xfrm rot="13206038">
+            <a:off x="12536876" y="-3806168"/>
+            <a:ext cx="5124900" cy="17239562"/>
+          </a:xfrm>
+          <a:prstGeom prst="triangle">
+            <a:avLst>
+              <a:gd name="adj" fmla="val 49369"/>
+            </a:avLst>
+          </a:prstGeom>
+          <a:gradFill>
+            <a:gsLst>
+              <a:gs pos="30000">
+                <a:srgbClr val="452454">
+                  <a:alpha val="0"/>
+                </a:srgbClr>
+              </a:gs>
+              <a:gs pos="64000">
+                <a:srgbClr val="452454">
+                  <a:alpha val="90000"/>
+                </a:srgbClr>
+              </a:gs>
+            </a:gsLst>
+            <a:lin ang="5400000" scaled="1"/>
+          </a:gradFill>
+          <a:ln>
+            <a:noFill/>
+          </a:ln>
+        </p:spPr>
+        <p:style>
+          <a:lnRef idx="2">
+            <a:schemeClr val="accent1">
+              <a:shade val="15000"/>
+            </a:schemeClr>
+          </a:lnRef>
+          <a:fillRef idx="1">
+            <a:schemeClr val="accent1"/>
+          </a:fillRef>
+          <a:effectRef idx="0">
+            <a:schemeClr val="accent1"/>
+          </a:effectRef>
+          <a:fontRef idx="minor">
+            <a:schemeClr val="lt1"/>
+          </a:fontRef>
+        </p:style>
+        <p:txBody>
+          <a:bodyPr rtlCol="0" anchor="ctr"/>
+          <a:lstStyle/>
+          <a:p>
+            <a:pPr algn="ctr"/>
+            <a:endParaRPr lang="fr-FR"/>
+          </a:p>
+        </p:txBody>
+      </p:sp>
+      <p:sp>
+        <p:nvSpPr>
+          <p:cNvPr id="39" name="Isosceles Triangle 38">
+            <a:extLst>
+              <a:ext uri="{FF2B5EF4-FFF2-40B4-BE49-F238E27FC236}">
+                <a16:creationId xmlns:a16="http://schemas.microsoft.com/office/drawing/2014/main" id="{F1830643-1042-BA4E-5DF7-AC555C4AA18E}"/>
+              </a:ext>
+            </a:extLst>
+          </p:cNvPr>
+          <p:cNvSpPr/>
+          <p:nvPr/>
+        </p:nvSpPr>
+        <p:spPr>
+          <a:xfrm rot="2421312">
+            <a:off x="1489847" y="9373704"/>
+            <a:ext cx="5124900" cy="17239562"/>
+          </a:xfrm>
+          <a:prstGeom prst="triangle">
+            <a:avLst>
+              <a:gd name="adj" fmla="val 49369"/>
+            </a:avLst>
+          </a:prstGeom>
+          <a:gradFill>
+            <a:gsLst>
+              <a:gs pos="30000">
+                <a:srgbClr val="452454">
+                  <a:alpha val="0"/>
+                </a:srgbClr>
+              </a:gs>
+              <a:gs pos="64000">
+                <a:srgbClr val="452454">
+                  <a:alpha val="90000"/>
+                </a:srgbClr>
+              </a:gs>
+            </a:gsLst>
+            <a:lin ang="5400000" scaled="1"/>
+          </a:gradFill>
+          <a:ln>
+            <a:noFill/>
+          </a:ln>
+        </p:spPr>
+        <p:style>
+          <a:lnRef idx="2">
+            <a:schemeClr val="accent1">
+              <a:shade val="15000"/>
+            </a:schemeClr>
+          </a:lnRef>
+          <a:fillRef idx="1">
+            <a:schemeClr val="accent1"/>
+          </a:fillRef>
+          <a:effectRef idx="0">
+            <a:schemeClr val="accent1"/>
+          </a:effectRef>
+          <a:fontRef idx="minor">
+            <a:schemeClr val="lt1"/>
+          </a:fontRef>
+        </p:style>
+        <p:txBody>
+          <a:bodyPr rtlCol="0" anchor="ctr"/>
+          <a:lstStyle/>
+          <a:p>
+            <a:pPr algn="ctr"/>
+            <a:endParaRPr lang="fr-FR"/>
+          </a:p>
+        </p:txBody>
+      </p:sp>
+      <p:sp>
+        <p:nvSpPr>
+          <p:cNvPr id="40" name="Isosceles Triangle 39">
+            <a:extLst>
+              <a:ext uri="{FF2B5EF4-FFF2-40B4-BE49-F238E27FC236}">
+                <a16:creationId xmlns:a16="http://schemas.microsoft.com/office/drawing/2014/main" id="{E2A4B9E9-5DB6-9F99-E717-3342FA7303B4}"/>
+              </a:ext>
+            </a:extLst>
+          </p:cNvPr>
+          <p:cNvSpPr/>
+          <p:nvPr/>
+        </p:nvSpPr>
+        <p:spPr>
+          <a:xfrm rot="5400000">
+            <a:off x="-1513038" y="2858917"/>
+            <a:ext cx="5124900" cy="17239562"/>
+          </a:xfrm>
+          <a:prstGeom prst="triangle">
+            <a:avLst>
+              <a:gd name="adj" fmla="val 49369"/>
+            </a:avLst>
+          </a:prstGeom>
+          <a:gradFill>
+            <a:gsLst>
+              <a:gs pos="30000">
+                <a:srgbClr val="452454">
+                  <a:alpha val="0"/>
+                </a:srgbClr>
+              </a:gs>
+              <a:gs pos="64000">
+                <a:srgbClr val="452454">
+                  <a:alpha val="90000"/>
+                </a:srgbClr>
+              </a:gs>
+            </a:gsLst>
+            <a:lin ang="5400000" scaled="1"/>
+          </a:gradFill>
+          <a:ln>
+            <a:noFill/>
+          </a:ln>
+        </p:spPr>
+        <p:style>
+          <a:lnRef idx="2">
+            <a:schemeClr val="accent1">
+              <a:shade val="15000"/>
+            </a:schemeClr>
+          </a:lnRef>
+          <a:fillRef idx="1">
+            <a:schemeClr val="accent1"/>
+          </a:fillRef>
+          <a:effectRef idx="0">
+            <a:schemeClr val="accent1"/>
+          </a:effectRef>
+          <a:fontRef idx="minor">
+            <a:schemeClr val="lt1"/>
+          </a:fontRef>
+        </p:style>
+        <p:txBody>
+          <a:bodyPr rtlCol="0" anchor="ctr"/>
+          <a:lstStyle/>
+          <a:p>
+            <a:pPr algn="ctr"/>
+            <a:endParaRPr lang="fr-FR"/>
+          </a:p>
+        </p:txBody>
+      </p:sp>
+      <p:sp>
+        <p:nvSpPr>
+          <p:cNvPr id="41" name="Isosceles Triangle 40">
+            <a:extLst>
+              <a:ext uri="{FF2B5EF4-FFF2-40B4-BE49-F238E27FC236}">
+                <a16:creationId xmlns:a16="http://schemas.microsoft.com/office/drawing/2014/main" id="{B41EA1B1-9898-5BA5-E314-8EFB901527CD}"/>
+              </a:ext>
+            </a:extLst>
+          </p:cNvPr>
+          <p:cNvSpPr/>
+          <p:nvPr/>
+        </p:nvSpPr>
+        <p:spPr>
+          <a:xfrm rot="16200000">
+            <a:off x="15579156" y="2810219"/>
+            <a:ext cx="5124900" cy="17239562"/>
+          </a:xfrm>
+          <a:prstGeom prst="triangle">
+            <a:avLst>
+              <a:gd name="adj" fmla="val 49369"/>
+            </a:avLst>
+          </a:prstGeom>
+          <a:gradFill>
+            <a:gsLst>
+              <a:gs pos="30000">
+                <a:srgbClr val="452454">
+                  <a:alpha val="0"/>
+                </a:srgbClr>
+              </a:gs>
+              <a:gs pos="64000">
+                <a:srgbClr val="452454">
+                  <a:alpha val="90000"/>
+                </a:srgbClr>
+              </a:gs>
+            </a:gsLst>
+            <a:lin ang="5400000" scaled="1"/>
+          </a:gradFill>
+          <a:ln>
+            <a:noFill/>
+          </a:ln>
+        </p:spPr>
+        <p:style>
+          <a:lnRef idx="2">
+            <a:schemeClr val="accent1">
+              <a:shade val="15000"/>
+            </a:schemeClr>
+          </a:lnRef>
+          <a:fillRef idx="1">
+            <a:schemeClr val="accent1"/>
+          </a:fillRef>
+          <a:effectRef idx="0">
+            <a:schemeClr val="accent1"/>
+          </a:effectRef>
+          <a:fontRef idx="minor">
+            <a:schemeClr val="lt1"/>
+          </a:fontRef>
+        </p:style>
+        <p:txBody>
+          <a:bodyPr rtlCol="0" anchor="ctr"/>
+          <a:lstStyle/>
+          <a:p>
+            <a:pPr algn="ctr"/>
+            <a:endParaRPr lang="fr-FR"/>
+          </a:p>
+        </p:txBody>
+      </p:sp>
+      <p:sp>
+        <p:nvSpPr>
+          <p:cNvPr id="42" name="Isosceles Triangle 41">
+            <a:extLst>
+              <a:ext uri="{FF2B5EF4-FFF2-40B4-BE49-F238E27FC236}">
+                <a16:creationId xmlns:a16="http://schemas.microsoft.com/office/drawing/2014/main" id="{5D88E581-9E70-DD54-0FB7-0332A25A3B0C}"/>
+              </a:ext>
+            </a:extLst>
+          </p:cNvPr>
+          <p:cNvSpPr/>
+          <p:nvPr/>
+        </p:nvSpPr>
+        <p:spPr>
+          <a:xfrm rot="10800000">
+            <a:off x="6999811" y="-5728071"/>
+            <a:ext cx="5124900" cy="17239562"/>
+          </a:xfrm>
+          <a:prstGeom prst="triangle">
+            <a:avLst>
+              <a:gd name="adj" fmla="val 49369"/>
+            </a:avLst>
+          </a:prstGeom>
+          <a:gradFill>
+            <a:gsLst>
+              <a:gs pos="30000">
+                <a:srgbClr val="452454">
+                  <a:alpha val="0"/>
+                </a:srgbClr>
+              </a:gs>
+              <a:gs pos="64000">
+                <a:srgbClr val="452454">
+                  <a:alpha val="90000"/>
+                </a:srgbClr>
+              </a:gs>
+            </a:gsLst>
+            <a:lin ang="5400000" scaled="1"/>
+          </a:gradFill>
+          <a:ln>
+            <a:noFill/>
+          </a:ln>
+        </p:spPr>
+        <p:style>
+          <a:lnRef idx="2">
+            <a:schemeClr val="accent1">
+              <a:shade val="15000"/>
+            </a:schemeClr>
+          </a:lnRef>
+          <a:fillRef idx="1">
+            <a:schemeClr val="accent1"/>
+          </a:fillRef>
+          <a:effectRef idx="0">
+            <a:schemeClr val="accent1"/>
+          </a:effectRef>
+          <a:fontRef idx="minor">
+            <a:schemeClr val="lt1"/>
+          </a:fontRef>
+        </p:style>
+        <p:txBody>
+          <a:bodyPr rtlCol="0" anchor="ctr"/>
+          <a:lstStyle/>
+          <a:p>
+            <a:pPr algn="ctr"/>
+            <a:endParaRPr lang="fr-FR"/>
+          </a:p>
+        </p:txBody>
+      </p:sp>
+      <p:sp>
+        <p:nvSpPr>
+          <p:cNvPr id="43" name="Isosceles Triangle 42">
+            <a:extLst>
+              <a:ext uri="{FF2B5EF4-FFF2-40B4-BE49-F238E27FC236}">
+                <a16:creationId xmlns:a16="http://schemas.microsoft.com/office/drawing/2014/main" id="{87965C99-85D4-8A5E-380A-8BE3AE9C1471}"/>
+              </a:ext>
+            </a:extLst>
+          </p:cNvPr>
+          <p:cNvSpPr/>
+          <p:nvPr/>
+        </p:nvSpPr>
+        <p:spPr>
+          <a:xfrm>
+            <a:off x="7048798" y="11420090"/>
+            <a:ext cx="5124900" cy="17239562"/>
+          </a:xfrm>
+          <a:prstGeom prst="triangle">
+            <a:avLst>
+              <a:gd name="adj" fmla="val 49369"/>
+            </a:avLst>
+          </a:prstGeom>
+          <a:gradFill>
+            <a:gsLst>
+              <a:gs pos="30000">
+                <a:srgbClr val="452454">
+                  <a:alpha val="0"/>
+                </a:srgbClr>
+              </a:gs>
+              <a:gs pos="64000">
+                <a:srgbClr val="452454">
+                  <a:alpha val="90000"/>
+                </a:srgbClr>
+              </a:gs>
+            </a:gsLst>
+            <a:lin ang="5400000" scaled="1"/>
+          </a:gradFill>
+          <a:ln>
+            <a:noFill/>
+          </a:ln>
+        </p:spPr>
+        <p:style>
+          <a:lnRef idx="2">
+            <a:schemeClr val="accent1">
+              <a:shade val="15000"/>
+            </a:schemeClr>
+          </a:lnRef>
+          <a:fillRef idx="1">
+            <a:schemeClr val="accent1"/>
+          </a:fillRef>
+          <a:effectRef idx="0">
+            <a:schemeClr val="accent1"/>
+          </a:effectRef>
+          <a:fontRef idx="minor">
+            <a:schemeClr val="lt1"/>
+          </a:fontRef>
+        </p:style>
+        <p:txBody>
+          <a:bodyPr rtlCol="0" anchor="ctr"/>
+          <a:lstStyle/>
+          <a:p>
+            <a:pPr algn="ctr"/>
+            <a:endParaRPr lang="fr-FR"/>
+          </a:p>
+        </p:txBody>
+      </p:sp>
+    </p:spTree>
+    <p:extLst>
+      <p:ext uri="{BB962C8B-B14F-4D97-AF65-F5344CB8AC3E}">
+        <p14:creationId xmlns:p14="http://schemas.microsoft.com/office/powerpoint/2010/main" val="511174551"/>
+      </p:ext>
+    </p:extLst>
+  </p:cSld>
+  <p:clrMapOvr>
+    <a:masterClrMapping/>
+  </p:clrMapOvr>
+</p:sld>
+</file>
+
+<file path=ppt/slides/slide4.xml><?xml version="1.0" encoding="utf-8"?>
+<p:sld xmlns:a="http://schemas.openxmlformats.org/drawingml/2006/main" xmlns:r="http://schemas.openxmlformats.org/officeDocument/2006/relationships" xmlns:p="http://schemas.openxmlformats.org/presentationml/2006/main">
+  <p:cSld>
+    <p:spTree>
+      <p:nvGrpSpPr>
+        <p:cNvPr id="1" name=""/>
+        <p:cNvGrpSpPr/>
+        <p:nvPr/>
+      </p:nvGrpSpPr>
+      <p:grpSpPr>
+        <a:xfrm>
+          <a:off x="0" y="0"/>
+          <a:ext cx="0" cy="0"/>
+          <a:chOff x="0" y="0"/>
+          <a:chExt cx="0" cy="0"/>
+        </a:xfrm>
+      </p:grpSpPr>
+      <p:pic>
+        <p:nvPicPr>
+          <p:cNvPr id="4" name="Picture 3">
+            <a:extLst>
+              <a:ext uri="{FF2B5EF4-FFF2-40B4-BE49-F238E27FC236}">
+                <a16:creationId xmlns:a16="http://schemas.microsoft.com/office/drawing/2014/main" id="{4E636C59-466E-00E4-4589-14D61041C521}"/>
+              </a:ext>
+            </a:extLst>
+          </p:cNvPr>
+          <p:cNvPicPr>
+            <a:picLocks noChangeAspect="1"/>
+          </p:cNvPicPr>
+          <p:nvPr/>
+        </p:nvPicPr>
+        <p:blipFill>
+          <a:blip r:embed="rId2"/>
+          <a:stretch>
+            <a:fillRect/>
+          </a:stretch>
+        </p:blipFill>
+        <p:spPr>
+          <a:xfrm>
+            <a:off x="251374" y="846192"/>
+            <a:ext cx="18792276" cy="22013808"/>
+          </a:xfrm>
+          <a:prstGeom prst="rect">
+            <a:avLst/>
+          </a:prstGeom>
+        </p:spPr>
+      </p:pic>
+    </p:spTree>
+    <p:extLst>
+      <p:ext uri="{BB962C8B-B14F-4D97-AF65-F5344CB8AC3E}">
+        <p14:creationId xmlns:p14="http://schemas.microsoft.com/office/powerpoint/2010/main" val="2194516069"/>
+      </p:ext>
+    </p:extLst>
+  </p:cSld>
+  <p:clrMapOvr>
+    <a:masterClrMapping/>
+  </p:clrMapOvr>
+</p:sld>
+</file>
+
 <file path=ppt/theme/theme1.xml><?xml version="1.0" encoding="utf-8"?>
 <a:theme xmlns:a="http://schemas.openxmlformats.org/drawingml/2006/main" name="Office Theme">
   <a:themeElements>
